--- a/Foundation_F1/Y7_F1_Wk03_L2_F1L08_Reading_Aloud_Decoding.pptx
+++ b/Foundation_F1/Y7_F1_Wk03_L2_F1L08_Reading_Aloud_Decoding.pptx
@@ -35463,7 +35463,7 @@
                 <a:ea typeface="Amiri" pitchFamily="34" charset="-122"/>
                 <a:cs typeface="Amiri" pitchFamily="34" charset="-120"/>
               </a:rPr>
-              <a:t>الكِتَابَةُ اليَدَوِيَّةُ وَالإِمْلَاءُ</a:t>
+              <a:t>التَّدْرِيبُ عَلَى الكِتَابَةِ</a:t>
             </a:r>
             <a:endParaRPr lang="ar-SA" sz="2400" dirty="0"/>
           </a:p>
